--- a/Presentacion_Ejecutiva_Clearview_Properties_Cuesta.pptx
+++ b/Presentacion_Ejecutiva_Clearview_Properties_Cuesta.pptx
@@ -313,7 +313,7 @@
           <a:p>
             <a:fld id="{5BCAD085-E8A6-8845-BD4E-CB4CCA059FC4}" type="datetimeFigureOut">
               <a:rPr lang="en-US" smtClean="0"/>
-              <a:t>8/27/2026</a:t>
+              <a:t>8/29/2026</a:t>
             </a:fld>
             <a:endParaRPr lang="en-US"/>
           </a:p>
@@ -481,7 +481,7 @@
           <a:p>
             <a:fld id="{5BCAD085-E8A6-8845-BD4E-CB4CCA059FC4}" type="datetimeFigureOut">
               <a:rPr lang="en-US" smtClean="0"/>
-              <a:t>8/27/2026</a:t>
+              <a:t>8/29/2026</a:t>
             </a:fld>
             <a:endParaRPr lang="en-US"/>
           </a:p>
@@ -659,7 +659,7 @@
           <a:p>
             <a:fld id="{5BCAD085-E8A6-8845-BD4E-CB4CCA059FC4}" type="datetimeFigureOut">
               <a:rPr lang="en-US" smtClean="0"/>
-              <a:t>8/27/2026</a:t>
+              <a:t>8/29/2026</a:t>
             </a:fld>
             <a:endParaRPr lang="en-US"/>
           </a:p>
@@ -827,7 +827,7 @@
           <a:p>
             <a:fld id="{5BCAD085-E8A6-8845-BD4E-CB4CCA059FC4}" type="datetimeFigureOut">
               <a:rPr lang="en-US" smtClean="0"/>
-              <a:t>8/27/2026</a:t>
+              <a:t>8/29/2026</a:t>
             </a:fld>
             <a:endParaRPr lang="en-US"/>
           </a:p>
@@ -1072,7 +1072,7 @@
           <a:p>
             <a:fld id="{5BCAD085-E8A6-8845-BD4E-CB4CCA059FC4}" type="datetimeFigureOut">
               <a:rPr lang="en-US" smtClean="0"/>
-              <a:t>8/27/2026</a:t>
+              <a:t>8/29/2026</a:t>
             </a:fld>
             <a:endParaRPr lang="en-US"/>
           </a:p>
@@ -1357,7 +1357,7 @@
           <a:p>
             <a:fld id="{5BCAD085-E8A6-8845-BD4E-CB4CCA059FC4}" type="datetimeFigureOut">
               <a:rPr lang="en-US" smtClean="0"/>
-              <a:t>8/27/2026</a:t>
+              <a:t>8/29/2026</a:t>
             </a:fld>
             <a:endParaRPr lang="en-US"/>
           </a:p>
@@ -1776,7 +1776,7 @@
           <a:p>
             <a:fld id="{5BCAD085-E8A6-8845-BD4E-CB4CCA059FC4}" type="datetimeFigureOut">
               <a:rPr lang="en-US" smtClean="0"/>
-              <a:t>8/27/2026</a:t>
+              <a:t>8/29/2026</a:t>
             </a:fld>
             <a:endParaRPr lang="en-US"/>
           </a:p>
@@ -1893,7 +1893,7 @@
           <a:p>
             <a:fld id="{5BCAD085-E8A6-8845-BD4E-CB4CCA059FC4}" type="datetimeFigureOut">
               <a:rPr lang="en-US" smtClean="0"/>
-              <a:t>8/27/2026</a:t>
+              <a:t>8/29/2026</a:t>
             </a:fld>
             <a:endParaRPr lang="en-US"/>
           </a:p>
@@ -1988,7 +1988,7 @@
           <a:p>
             <a:fld id="{5BCAD085-E8A6-8845-BD4E-CB4CCA059FC4}" type="datetimeFigureOut">
               <a:rPr lang="en-US" smtClean="0"/>
-              <a:t>8/27/2026</a:t>
+              <a:t>8/29/2026</a:t>
             </a:fld>
             <a:endParaRPr lang="en-US"/>
           </a:p>
@@ -2263,7 +2263,7 @@
           <a:p>
             <a:fld id="{5BCAD085-E8A6-8845-BD4E-CB4CCA059FC4}" type="datetimeFigureOut">
               <a:rPr lang="en-US" smtClean="0"/>
-              <a:t>8/27/2026</a:t>
+              <a:t>8/29/2026</a:t>
             </a:fld>
             <a:endParaRPr lang="en-US"/>
           </a:p>
@@ -2515,7 +2515,7 @@
           <a:p>
             <a:fld id="{5BCAD085-E8A6-8845-BD4E-CB4CCA059FC4}" type="datetimeFigureOut">
               <a:rPr lang="en-US" smtClean="0"/>
-              <a:t>8/27/2026</a:t>
+              <a:t>8/29/2026</a:t>
             </a:fld>
             <a:endParaRPr lang="en-US"/>
           </a:p>
@@ -2726,7 +2726,7 @@
           <a:p>
             <a:fld id="{5BCAD085-E8A6-8845-BD4E-CB4CCA059FC4}" type="datetimeFigureOut">
               <a:rPr lang="en-US" smtClean="0"/>
-              <a:t>8/27/2026</a:t>
+              <a:t>8/29/2026</a:t>
             </a:fld>
             <a:endParaRPr lang="en-US"/>
           </a:p>
@@ -7418,7 +7418,7 @@
         <p:spPr>
           <a:xfrm>
             <a:off x="914400" y="1508760"/>
-            <a:ext cx="4754880" cy="4754880"/>
+            <a:ext cx="4754880" cy="1615827"/>
           </a:xfrm>
           <a:prstGeom prst="rect">
             <a:avLst/>
@@ -7439,8 +7439,22 @@
               </a:defRPr>
             </a:pPr>
             <a:r>
-              <a:t>Impacto de Factores Estructurales</a:t>
-            </a:r>
+              <a:rPr dirty="0"/>
+              <a:t>Impacto de </a:t>
+            </a:r>
+            <a:r>
+              <a:rPr dirty="0" err="1"/>
+              <a:t>Factores</a:t>
+            </a:r>
+            <a:r>
+              <a:rPr dirty="0"/>
+              <a:t> </a:t>
+            </a:r>
+            <a:r>
+              <a:rPr dirty="0" err="1"/>
+              <a:t>Estructurales</a:t>
+            </a:r>
+            <a:endParaRPr dirty="0"/>
           </a:p>
           <a:p>
             <a:pPr>
@@ -7454,7 +7468,32 @@
               </a:defRPr>
             </a:pPr>
             <a:r>
-              <a:t>• Calidad General de Construcción: +$20,424 por punto (escala 1 a 10)</a:t>
+              <a:rPr dirty="0"/>
+              <a:t>• Calidad General de </a:t>
+            </a:r>
+            <a:r>
+              <a:rPr dirty="0" err="1"/>
+              <a:t>Construcción</a:t>
+            </a:r>
+            <a:r>
+              <a:rPr dirty="0"/>
+              <a:t>: +$20,424 </a:t>
+            </a:r>
+            <a:r>
+              <a:rPr dirty="0" err="1"/>
+              <a:t>por</a:t>
+            </a:r>
+            <a:r>
+              <a:rPr dirty="0"/>
+              <a:t> punto (</a:t>
+            </a:r>
+            <a:r>
+              <a:rPr dirty="0" err="1"/>
+              <a:t>escala</a:t>
+            </a:r>
+            <a:r>
+              <a:rPr dirty="0"/>
+              <a:t> 1 a 10)</a:t>
             </a:r>
           </a:p>
           <a:p>
@@ -7469,8 +7508,30 @@
               </a:defRPr>
             </a:pPr>
             <a:r>
-              <a:t>• Metros Cuadrados Habitables: +0.42% en precio por cada +1% de área</a:t>
-            </a:r>
+              <a:rPr dirty="0"/>
+              <a:t>• Metros </a:t>
+            </a:r>
+            <a:r>
+              <a:rPr dirty="0" err="1"/>
+              <a:t>Cuadrados</a:t>
+            </a:r>
+            <a:r>
+              <a:rPr dirty="0"/>
+              <a:t> </a:t>
+            </a:r>
+            <a:r>
+              <a:rPr dirty="0" err="1"/>
+              <a:t>Habitables</a:t>
+            </a:r>
+            <a:r>
+              <a:rPr dirty="0"/>
+              <a:t>: </a:t>
+            </a:r>
+            <a:r>
+              <a:rPr lang="es-ES" dirty="0"/>
+              <a:t>$41 por pie cuadrado, ($4100/100sqft).</a:t>
+            </a:r>
+            <a:endParaRPr dirty="0"/>
           </a:p>
           <a:p>
             <a:pPr>
@@ -7484,7 +7545,48 @@
               </a:defRPr>
             </a:pPr>
             <a:r>
-              <a:t>• Superficie del Sótano: +$34 por pie cuadrado (+$3,400 / 100 sqft)</a:t>
+              <a:rPr dirty="0"/>
+              <a:t>• </a:t>
+            </a:r>
+            <a:r>
+              <a:rPr dirty="0" err="1"/>
+              <a:t>Superficie</a:t>
+            </a:r>
+            <a:r>
+              <a:rPr dirty="0"/>
+              <a:t> del </a:t>
+            </a:r>
+            <a:r>
+              <a:rPr dirty="0" err="1"/>
+              <a:t>Sótano</a:t>
+            </a:r>
+            <a:r>
+              <a:rPr dirty="0"/>
+              <a:t>: +$34 </a:t>
+            </a:r>
+            <a:r>
+              <a:rPr dirty="0" err="1"/>
+              <a:t>por</a:t>
+            </a:r>
+            <a:r>
+              <a:rPr dirty="0"/>
+              <a:t> pie </a:t>
+            </a:r>
+            <a:r>
+              <a:rPr dirty="0" err="1"/>
+              <a:t>cuadrado</a:t>
+            </a:r>
+            <a:r>
+              <a:rPr dirty="0"/>
+              <a:t> (+$3,400 / 100 </a:t>
+            </a:r>
+            <a:r>
+              <a:rPr dirty="0" err="1"/>
+              <a:t>sqft</a:t>
+            </a:r>
+            <a:r>
+              <a:rPr dirty="0"/>
+              <a:t>)</a:t>
             </a:r>
           </a:p>
           <a:p>
@@ -7499,8 +7601,38 @@
               </a:defRPr>
             </a:pPr>
             <a:r>
-              <a:t>• Capacidad del Garaje: +$8,589 por plaza de auto adicional</a:t>
-            </a:r>
+              <a:rPr dirty="0"/>
+              <a:t>• </a:t>
+            </a:r>
+            <a:r>
+              <a:rPr dirty="0" err="1"/>
+              <a:t>Capacidad</a:t>
+            </a:r>
+            <a:r>
+              <a:rPr dirty="0"/>
+              <a:t> del </a:t>
+            </a:r>
+            <a:r>
+              <a:rPr dirty="0" err="1"/>
+              <a:t>Garaje</a:t>
+            </a:r>
+            <a:r>
+              <a:rPr dirty="0"/>
+              <a:t>: +$8,589 </a:t>
+            </a:r>
+            <a:r>
+              <a:rPr dirty="0" err="1"/>
+              <a:t>por</a:t>
+            </a:r>
+            <a:r>
+              <a:rPr dirty="0"/>
+              <a:t> plaza de auto </a:t>
+            </a:r>
+            <a:r>
+              <a:rPr dirty="0" err="1"/>
+              <a:t>adicional</a:t>
+            </a:r>
+            <a:endParaRPr dirty="0"/>
           </a:p>
           <a:p>
             <a:pPr>
@@ -7514,7 +7646,48 @@
               </a:defRPr>
             </a:pPr>
             <a:r>
-              <a:t>• Año de Construcción: +$1,940 por cada década más moderna</a:t>
+              <a:rPr dirty="0"/>
+              <a:t>• Año de </a:t>
+            </a:r>
+            <a:r>
+              <a:rPr dirty="0" err="1"/>
+              <a:t>Construcción</a:t>
+            </a:r>
+            <a:r>
+              <a:rPr dirty="0"/>
+              <a:t>: +$1,940 </a:t>
+            </a:r>
+            <a:r>
+              <a:rPr dirty="0" err="1"/>
+              <a:t>por</a:t>
+            </a:r>
+            <a:r>
+              <a:rPr dirty="0"/>
+              <a:t> </a:t>
+            </a:r>
+            <a:r>
+              <a:rPr dirty="0" err="1"/>
+              <a:t>cada</a:t>
+            </a:r>
+            <a:r>
+              <a:rPr dirty="0"/>
+              <a:t> </a:t>
+            </a:r>
+            <a:r>
+              <a:rPr dirty="0" err="1"/>
+              <a:t>década</a:t>
+            </a:r>
+            <a:r>
+              <a:rPr dirty="0"/>
+              <a:t> </a:t>
+            </a:r>
+            <a:r>
+              <a:rPr dirty="0" err="1"/>
+              <a:t>más</a:t>
+            </a:r>
+            <a:r>
+              <a:rPr dirty="0"/>
+              <a:t> moderna</a:t>
             </a:r>
           </a:p>
         </p:txBody>
@@ -7574,7 +7747,7 @@
         <p:spPr>
           <a:xfrm>
             <a:off x="6400800" y="1508760"/>
-            <a:ext cx="4846320" cy="4754880"/>
+            <a:ext cx="4846320" cy="2908489"/>
           </a:xfrm>
           <a:prstGeom prst="rect">
             <a:avLst/>
@@ -7595,8 +7768,22 @@
               </a:defRPr>
             </a:pPr>
             <a:r>
-              <a:t>Impacto de Características Modificables</a:t>
-            </a:r>
+              <a:rPr dirty="0"/>
+              <a:t>Impacto de </a:t>
+            </a:r>
+            <a:r>
+              <a:rPr dirty="0" err="1"/>
+              <a:t>Características</a:t>
+            </a:r>
+            <a:r>
+              <a:rPr dirty="0"/>
+              <a:t> </a:t>
+            </a:r>
+            <a:r>
+              <a:rPr dirty="0" err="1"/>
+              <a:t>Modificables</a:t>
+            </a:r>
+            <a:endParaRPr dirty="0"/>
           </a:p>
           <a:p>
             <a:pPr>
@@ -7610,11 +7797,63 @@
               </a:defRPr>
             </a:pPr>
             <a:r>
-              <a:t>• Por cada Baño Completo adicional:</a:t>
-            </a:r>
-            <a:br/>
-            <a:r>
-              <a:t>  La casa se valoriza en +$9,688 (+$4,844 medio baño)</a:t>
+              <a:rPr dirty="0"/>
+              <a:t>• Por </a:t>
+            </a:r>
+            <a:r>
+              <a:rPr dirty="0" err="1"/>
+              <a:t>cada</a:t>
+            </a:r>
+            <a:r>
+              <a:rPr dirty="0"/>
+              <a:t> Baño </a:t>
+            </a:r>
+            <a:r>
+              <a:rPr dirty="0" err="1"/>
+              <a:t>Completo</a:t>
+            </a:r>
+            <a:r>
+              <a:rPr dirty="0"/>
+              <a:t> </a:t>
+            </a:r>
+            <a:r>
+              <a:rPr dirty="0" err="1"/>
+              <a:t>adicional</a:t>
+            </a:r>
+            <a:r>
+              <a:rPr dirty="0"/>
+              <a:t>:</a:t>
+            </a:r>
+            <a:br>
+              <a:rPr dirty="0"/>
+            </a:br>
+            <a:r>
+              <a:rPr dirty="0"/>
+              <a:t>  La casa se </a:t>
+            </a:r>
+            <a:r>
+              <a:rPr dirty="0" err="1"/>
+              <a:t>valoriza</a:t>
+            </a:r>
+            <a:r>
+              <a:rPr dirty="0"/>
+              <a:t> </a:t>
+            </a:r>
+            <a:r>
+              <a:rPr dirty="0" err="1"/>
+              <a:t>en</a:t>
+            </a:r>
+            <a:r>
+              <a:rPr dirty="0"/>
+              <a:t> +$9,688 (+$4,844 medio </a:t>
+            </a:r>
+            <a:r>
+              <a:rPr dirty="0" err="1"/>
+              <a:t>baño</a:t>
+            </a:r>
+            <a:r>
+              <a:rPr dirty="0"/>
+              <a:t>)</a:t>
             </a:r>
           </a:p>
           <a:p>
@@ -7629,12 +7868,53 @@
               </a:defRPr>
             </a:pPr>
             <a:r>
-              <a:t>• Por Pavimentar la Entrada vehicular:</a:t>
-            </a:r>
-            <a:br/>
-            <a:r>
-              <a:t>  La casa se valoriza en +$5,273 frente a tierra/grava</a:t>
-            </a:r>
+              <a:rPr dirty="0"/>
+              <a:t>• Por </a:t>
+            </a:r>
+            <a:r>
+              <a:rPr dirty="0" err="1"/>
+              <a:t>Pavimentar</a:t>
+            </a:r>
+            <a:r>
+              <a:rPr dirty="0"/>
+              <a:t> la Entrada vehicular:</a:t>
+            </a:r>
+            <a:br>
+              <a:rPr dirty="0"/>
+            </a:br>
+            <a:r>
+              <a:rPr dirty="0"/>
+              <a:t>  La casa se </a:t>
+            </a:r>
+            <a:r>
+              <a:rPr dirty="0" err="1"/>
+              <a:t>valoriza</a:t>
+            </a:r>
+            <a:r>
+              <a:rPr dirty="0"/>
+              <a:t> </a:t>
+            </a:r>
+            <a:r>
+              <a:rPr dirty="0" err="1"/>
+              <a:t>en</a:t>
+            </a:r>
+            <a:r>
+              <a:rPr dirty="0"/>
+              <a:t> +$5,273 </a:t>
+            </a:r>
+            <a:r>
+              <a:rPr dirty="0" err="1"/>
+              <a:t>frente</a:t>
+            </a:r>
+            <a:r>
+              <a:rPr dirty="0"/>
+              <a:t> a tierra/</a:t>
+            </a:r>
+            <a:r>
+              <a:rPr dirty="0" err="1"/>
+              <a:t>grava</a:t>
+            </a:r>
+            <a:endParaRPr dirty="0"/>
           </a:p>
           <a:p>
             <a:pPr>
@@ -7648,11 +7928,55 @@
               </a:defRPr>
             </a:pPr>
             <a:r>
-              <a:t>• Por Terminar el Interior del Garaje:</a:t>
-            </a:r>
-            <a:br/>
-            <a:r>
-              <a:t>  La casa se valoriza en +$3,025 (acabado y pintura)</a:t>
+              <a:rPr dirty="0"/>
+              <a:t>• Por </a:t>
+            </a:r>
+            <a:r>
+              <a:rPr dirty="0" err="1"/>
+              <a:t>Terminar</a:t>
+            </a:r>
+            <a:r>
+              <a:rPr dirty="0"/>
+              <a:t> el Interior del </a:t>
+            </a:r>
+            <a:r>
+              <a:rPr dirty="0" err="1"/>
+              <a:t>Garaje</a:t>
+            </a:r>
+            <a:r>
+              <a:rPr dirty="0"/>
+              <a:t>:</a:t>
+            </a:r>
+            <a:br>
+              <a:rPr dirty="0"/>
+            </a:br>
+            <a:r>
+              <a:rPr dirty="0"/>
+              <a:t>  La casa se </a:t>
+            </a:r>
+            <a:r>
+              <a:rPr dirty="0" err="1"/>
+              <a:t>valoriza</a:t>
+            </a:r>
+            <a:r>
+              <a:rPr dirty="0"/>
+              <a:t> </a:t>
+            </a:r>
+            <a:r>
+              <a:rPr dirty="0" err="1"/>
+              <a:t>en</a:t>
+            </a:r>
+            <a:r>
+              <a:rPr dirty="0"/>
+              <a:t> +$3,025 (</a:t>
+            </a:r>
+            <a:r>
+              <a:rPr dirty="0" err="1"/>
+              <a:t>acabado</a:t>
+            </a:r>
+            <a:r>
+              <a:rPr dirty="0"/>
+              <a:t> y pintura)</a:t>
             </a:r>
           </a:p>
           <a:p>
@@ -7667,12 +7991,61 @@
               </a:defRPr>
             </a:pPr>
             <a:r>
-              <a:t>• Por Modernizar la Cocina estándar:</a:t>
-            </a:r>
-            <a:br/>
-            <a:r>
-              <a:t>  La casa recupera +$5,436 al superar el nivel estándar</a:t>
-            </a:r>
+              <a:rPr dirty="0"/>
+              <a:t>• Por </a:t>
+            </a:r>
+            <a:r>
+              <a:rPr dirty="0" err="1"/>
+              <a:t>Modernizar</a:t>
+            </a:r>
+            <a:r>
+              <a:rPr dirty="0"/>
+              <a:t> la Cocina </a:t>
+            </a:r>
+            <a:r>
+              <a:rPr dirty="0" err="1"/>
+              <a:t>estándar</a:t>
+            </a:r>
+            <a:r>
+              <a:rPr dirty="0"/>
+              <a:t>:</a:t>
+            </a:r>
+            <a:br>
+              <a:rPr dirty="0"/>
+            </a:br>
+            <a:r>
+              <a:rPr dirty="0"/>
+              <a:t>  La casa </a:t>
+            </a:r>
+            <a:r>
+              <a:rPr dirty="0" err="1"/>
+              <a:t>recupera</a:t>
+            </a:r>
+            <a:r>
+              <a:rPr dirty="0"/>
+              <a:t> +$5,436 al </a:t>
+            </a:r>
+            <a:r>
+              <a:rPr dirty="0" err="1"/>
+              <a:t>superar</a:t>
+            </a:r>
+            <a:r>
+              <a:rPr dirty="0"/>
+              <a:t> el </a:t>
+            </a:r>
+            <a:r>
+              <a:rPr dirty="0" err="1"/>
+              <a:t>nivel</a:t>
+            </a:r>
+            <a:r>
+              <a:rPr dirty="0"/>
+              <a:t> </a:t>
+            </a:r>
+            <a:r>
+              <a:rPr dirty="0" err="1"/>
+              <a:t>estándar</a:t>
+            </a:r>
+            <a:endParaRPr dirty="0"/>
           </a:p>
           <a:p>
             <a:pPr>
@@ -7686,12 +8059,77 @@
               </a:defRPr>
             </a:pPr>
             <a:r>
-              <a:t>• Por cada Década de Remodelación:</a:t>
-            </a:r>
-            <a:br/>
-            <a:r>
-              <a:t>  La casa se valoriza en +$3,220 por actualización reciente</a:t>
-            </a:r>
+              <a:rPr dirty="0"/>
+              <a:t>• Por </a:t>
+            </a:r>
+            <a:r>
+              <a:rPr dirty="0" err="1"/>
+              <a:t>cada</a:t>
+            </a:r>
+            <a:r>
+              <a:rPr dirty="0"/>
+              <a:t> </a:t>
+            </a:r>
+            <a:r>
+              <a:rPr dirty="0" err="1"/>
+              <a:t>Década</a:t>
+            </a:r>
+            <a:r>
+              <a:rPr dirty="0"/>
+              <a:t> de </a:t>
+            </a:r>
+            <a:r>
+              <a:rPr dirty="0" err="1"/>
+              <a:t>Remodelación</a:t>
+            </a:r>
+            <a:r>
+              <a:rPr dirty="0"/>
+              <a:t>:</a:t>
+            </a:r>
+            <a:br>
+              <a:rPr dirty="0"/>
+            </a:br>
+            <a:r>
+              <a:rPr dirty="0"/>
+              <a:t>  La casa se </a:t>
+            </a:r>
+            <a:r>
+              <a:rPr dirty="0" err="1"/>
+              <a:t>valoriza</a:t>
+            </a:r>
+            <a:r>
+              <a:rPr dirty="0"/>
+              <a:t> </a:t>
+            </a:r>
+            <a:r>
+              <a:rPr dirty="0" err="1"/>
+              <a:t>en</a:t>
+            </a:r>
+            <a:r>
+              <a:rPr dirty="0"/>
+              <a:t> +$3,220 </a:t>
+            </a:r>
+            <a:r>
+              <a:rPr dirty="0" err="1"/>
+              <a:t>por</a:t>
+            </a:r>
+            <a:r>
+              <a:rPr dirty="0"/>
+              <a:t> </a:t>
+            </a:r>
+            <a:r>
+              <a:rPr dirty="0" err="1"/>
+              <a:t>actualización</a:t>
+            </a:r>
+            <a:r>
+              <a:rPr dirty="0"/>
+              <a:t> </a:t>
+            </a:r>
+            <a:r>
+              <a:rPr dirty="0" err="1"/>
+              <a:t>reciente</a:t>
+            </a:r>
+            <a:endParaRPr dirty="0"/>
           </a:p>
           <a:p>
             <a:pPr>
@@ -7705,11 +8143,79 @@
               </a:defRPr>
             </a:pPr>
             <a:r>
-              <a:t>• Por Construir Chimenea desde cero:</a:t>
-            </a:r>
-            <a:br/>
-            <a:r>
-              <a:t>  Suma +$11,340, pero el costo de obra supera los $11,000</a:t>
+              <a:rPr dirty="0"/>
+              <a:t>• Por </a:t>
+            </a:r>
+            <a:r>
+              <a:rPr dirty="0" err="1"/>
+              <a:t>Construir</a:t>
+            </a:r>
+            <a:r>
+              <a:rPr dirty="0"/>
+              <a:t> Chimenea </a:t>
+            </a:r>
+            <a:r>
+              <a:rPr dirty="0" err="1"/>
+              <a:t>desde</a:t>
+            </a:r>
+            <a:r>
+              <a:rPr dirty="0"/>
+              <a:t> cero:</a:t>
+            </a:r>
+            <a:br>
+              <a:rPr dirty="0"/>
+            </a:br>
+            <a:r>
+              <a:rPr dirty="0"/>
+              <a:t>  Suma +$11,3</a:t>
+            </a:r>
+            <a:r>
+              <a:rPr lang="es-ES" dirty="0"/>
+              <a:t>05</a:t>
+            </a:r>
+            <a:r>
+              <a:rPr dirty="0"/>
+              <a:t>, </a:t>
+            </a:r>
+            <a:r>
+              <a:rPr dirty="0" err="1"/>
+              <a:t>pero</a:t>
+            </a:r>
+            <a:r>
+              <a:rPr dirty="0"/>
+              <a:t> el </a:t>
+            </a:r>
+            <a:r>
+              <a:rPr dirty="0" err="1"/>
+              <a:t>costo</a:t>
+            </a:r>
+            <a:r>
+              <a:rPr dirty="0"/>
+              <a:t> de </a:t>
+            </a:r>
+            <a:r>
+              <a:rPr dirty="0" err="1"/>
+              <a:t>obra</a:t>
+            </a:r>
+            <a:r>
+              <a:rPr dirty="0"/>
+              <a:t> </a:t>
+            </a:r>
+            <a:r>
+              <a:rPr dirty="0" err="1"/>
+              <a:t>supera</a:t>
+            </a:r>
+            <a:r>
+              <a:rPr dirty="0"/>
+              <a:t> </a:t>
+            </a:r>
+            <a:r>
+              <a:rPr dirty="0" err="1"/>
+              <a:t>los</a:t>
+            </a:r>
+            <a:r>
+              <a:rPr dirty="0"/>
+              <a:t> $11,000</a:t>
             </a:r>
           </a:p>
         </p:txBody>
@@ -7956,7 +8462,7 @@
         <p:spPr>
           <a:xfrm>
             <a:off x="7132320" y="1508760"/>
-            <a:ext cx="4114800" cy="4754880"/>
+            <a:ext cx="4114800" cy="3365024"/>
           </a:xfrm>
           <a:prstGeom prst="rect">
             <a:avLst/>
@@ -8318,7 +8824,15 @@
             </a:r>
             <a:r>
               <a:rPr dirty="0"/>
-              <a:t> $11,340, la </a:t>
+              <a:t> $11,3</a:t>
+            </a:r>
+            <a:r>
+              <a:rPr lang="es-ES" dirty="0"/>
+              <a:t>05</a:t>
+            </a:r>
+            <a:r>
+              <a:rPr dirty="0"/>
+              <a:t>, la </a:t>
             </a:r>
             <a:r>
               <a:rPr dirty="0" err="1"/>

--- a/Presentacion_Ejecutiva_Clearview_Properties_Cuesta.pptx
+++ b/Presentacion_Ejecutiva_Clearview_Properties_Cuesta.pptx
@@ -4525,7 +4525,7 @@
               </a:defRPr>
             </a:pPr>
             <a:r>
-              <a:t>• Fuentes y Costos de Remodelación: El dataset histórico registra únicamente características físicas y precios de venta, mas no presupuestos de obra. Los costos presentados corresponden a referencias de la industria (Cost vs. Value Report: www.costvsvalue.com y NAHB: www.nahb.org); deben validarse con contratistas locales de Cedar Falls.</a:t>
+              <a:t>• Costos de Remodelación No Disponibles: El dataset histórico registra únicamente características físicas y precios de venta, no presupuestos de obra. Por eso Q3 ordena impacto en el precio, no rentabilidad en dólares — cerrar esa brecha requiere referencias reales de costo de remodelación para Cedar Falls, un paso siguiente recomendado, no algo disponible en este dataset.</a:t>
             </a:r>
           </a:p>
           <a:p>
@@ -6774,7 +6774,7 @@
             </a:r>
             <a:br/>
             <a:r>
-              <a:t>• Cierre garantizado en menos de 30 días.</a:t>
+              <a:t>• Cierre rápido garantizado.</a:t>
             </a:r>
             <a:br/>
             <a:r>
@@ -8354,7 +8354,7 @@
               </a:defRPr>
             </a:pPr>
             <a:r>
-              <a:t>Q3 · ¿Qué mejoras son rentables? Retorno Financiero vs. Costo</a:t>
+              <a:t>Q3 · ¿Qué mejoras son rentables? Ranking de Impacto</a:t>
             </a:r>
           </a:p>
         </p:txBody>
@@ -8377,30 +8377,6 @@
           <a:xfrm>
             <a:off x="9875520" y="475488"/>
             <a:ext cx="1554480" cy="500595"/>
-          </a:xfrm>
-          <a:prstGeom prst="rect">
-            <a:avLst/>
-          </a:prstGeom>
-        </p:spPr>
-      </p:pic>
-      <p:pic>
-        <p:nvPicPr>
-          <p:cNvPr id="6" name="Picture 5" descr="fig_q3_matriz.png"/>
-          <p:cNvPicPr>
-            <a:picLocks noChangeAspect="1"/>
-          </p:cNvPicPr>
-          <p:nvPr/>
-        </p:nvPicPr>
-        <p:blipFill>
-          <a:blip r:embed="rId3"/>
-          <a:stretch>
-            <a:fillRect/>
-          </a:stretch>
-        </p:blipFill>
-        <p:spPr>
-          <a:xfrm>
-            <a:off x="731520" y="1371600"/>
-            <a:ext cx="6035040" cy="2983615"/>
           </a:xfrm>
           <a:prstGeom prst="rect">
             <a:avLst/>
@@ -8462,7 +8438,7 @@
         <p:spPr>
           <a:xfrm>
             <a:off x="7132320" y="1508760"/>
-            <a:ext cx="4114800" cy="3365024"/>
+            <a:ext cx="4114800" cy="4842351"/>
           </a:xfrm>
           <a:prstGeom prst="rect">
             <a:avLst/>
@@ -8517,149 +8493,15 @@
             </a:pPr>
             <a:r>
               <a:rPr dirty="0"/>
-              <a:t>1. Quick Wins (Alta </a:t>
-            </a:r>
-            <a:r>
-              <a:rPr dirty="0" err="1"/>
-              <a:t>Rentabilidad</a:t>
-            </a:r>
-            <a:r>
-              <a:rPr dirty="0"/>
-              <a:t>):</a:t>
+              <a:t>1. Quick Wins (Alto Impacto):• Baño Adicional: Entrega un retorno promedio de +$9,688 por baño completo adicional (y +$4,844 por medio baño). Es la intervención puntual más sólida y universal del mercado.• Pavimentación: Genera una ganancia directa de +$5,273 en el precio. Es la llave estratégica y de bajo costo para sacar una propiedad del segmento más barato de la ciudad.• Garaje Terminado: Aporta +$3,025 a la tasación con un costo de obra mínimo (enlucido y pintura de paredes/cielos).</a:t>
             </a:r>
             <a:br>
               <a:rPr dirty="0"/>
             </a:br>
-            <a:r>
-              <a:rPr dirty="0"/>
-              <a:t>• Baño </a:t>
-            </a:r>
-            <a:r>
-              <a:rPr dirty="0" err="1"/>
-              <a:t>Adicional</a:t>
-            </a:r>
-            <a:r>
-              <a:rPr dirty="0"/>
-              <a:t>: Valor </a:t>
-            </a:r>
-            <a:r>
-              <a:rPr dirty="0" err="1"/>
-              <a:t>agregado</a:t>
-            </a:r>
-            <a:r>
-              <a:rPr dirty="0"/>
-              <a:t> de +$9,688 </a:t>
-            </a:r>
-            <a:r>
-              <a:rPr dirty="0" err="1"/>
-              <a:t>frente</a:t>
-            </a:r>
-            <a:r>
-              <a:rPr dirty="0"/>
-              <a:t> a un </a:t>
-            </a:r>
-            <a:r>
-              <a:rPr dirty="0" err="1"/>
-              <a:t>costo</a:t>
-            </a:r>
-            <a:r>
-              <a:rPr dirty="0"/>
-              <a:t> de ~$4,500 (</a:t>
-            </a:r>
-            <a:r>
-              <a:rPr dirty="0" err="1"/>
-              <a:t>Retorno</a:t>
-            </a:r>
-            <a:r>
-              <a:rPr dirty="0"/>
-              <a:t> superior al 100%).</a:t>
-            </a:r>
             <a:br>
               <a:rPr dirty="0"/>
             </a:br>
-            <a:r>
-              <a:rPr dirty="0"/>
-              <a:t>• </a:t>
-            </a:r>
-            <a:r>
-              <a:rPr dirty="0" err="1"/>
-              <a:t>Pavimentación</a:t>
-            </a:r>
-            <a:r>
-              <a:rPr dirty="0"/>
-              <a:t>: Valor </a:t>
-            </a:r>
-            <a:r>
-              <a:rPr dirty="0" err="1"/>
-              <a:t>agregado</a:t>
-            </a:r>
-            <a:r>
-              <a:rPr dirty="0"/>
-              <a:t> de +$5,273 </a:t>
-            </a:r>
-            <a:r>
-              <a:rPr dirty="0" err="1"/>
-              <a:t>frente</a:t>
-            </a:r>
-            <a:r>
-              <a:rPr dirty="0"/>
-              <a:t> a </a:t>
-            </a:r>
-            <a:r>
-              <a:rPr dirty="0" err="1"/>
-              <a:t>costo</a:t>
-            </a:r>
-            <a:r>
-              <a:rPr dirty="0"/>
-              <a:t> de ~$2,500.</a:t>
-            </a:r>
-            <a:br>
-              <a:rPr dirty="0"/>
-            </a:br>
-            <a:r>
-              <a:rPr dirty="0"/>
-              <a:t>• </a:t>
-            </a:r>
-            <a:r>
-              <a:rPr dirty="0" err="1"/>
-              <a:t>Garaje</a:t>
-            </a:r>
-            <a:r>
-              <a:rPr dirty="0"/>
-              <a:t> </a:t>
-            </a:r>
-            <a:r>
-              <a:rPr dirty="0" err="1"/>
-              <a:t>Terminado</a:t>
-            </a:r>
-            <a:r>
-              <a:rPr dirty="0"/>
-              <a:t>: Valor </a:t>
-            </a:r>
-            <a:r>
-              <a:rPr dirty="0" err="1"/>
-              <a:t>agregado</a:t>
-            </a:r>
-            <a:r>
-              <a:rPr dirty="0"/>
-              <a:t> de +$3,025 </a:t>
-            </a:r>
-            <a:r>
-              <a:rPr dirty="0" err="1"/>
-              <a:t>frente</a:t>
-            </a:r>
-            <a:r>
-              <a:rPr dirty="0"/>
-              <a:t> a </a:t>
-            </a:r>
-            <a:r>
-              <a:rPr dirty="0" err="1"/>
-              <a:t>costo</a:t>
-            </a:r>
-            <a:r>
-              <a:rPr dirty="0"/>
-              <a:t> de ~$1,200.</a:t>
-            </a:r>
+            <a:endParaRPr dirty="0"/>
           </a:p>
           <a:p>
             <a:pPr>
@@ -8674,79 +8516,12 @@
             </a:pPr>
             <a:r>
               <a:rPr dirty="0"/>
-              <a:t>2. </a:t>
-            </a:r>
-            <a:r>
-              <a:rPr dirty="0" err="1"/>
-              <a:t>Actualizaciones</a:t>
-            </a:r>
-            <a:r>
-              <a:rPr dirty="0"/>
-              <a:t> </a:t>
-            </a:r>
-            <a:r>
-              <a:rPr dirty="0" err="1"/>
-              <a:t>Recomendadas</a:t>
-            </a:r>
-            <a:r>
-              <a:rPr dirty="0"/>
-              <a:t>:</a:t>
+              <a:t>2. Actualizaciones Recomendadas:• Cocina: Aconsejamos actualizar encimeras y mobiliario en cocinas de calidad promedio para recuperar +$5,436 de valor castigado por el mercado.</a:t>
             </a:r>
             <a:br>
               <a:rPr dirty="0"/>
             </a:br>
-            <a:r>
-              <a:rPr dirty="0"/>
-              <a:t>• Cocina: </a:t>
-            </a:r>
-            <a:r>
-              <a:rPr dirty="0" err="1"/>
-              <a:t>Recupera</a:t>
-            </a:r>
-            <a:r>
-              <a:rPr dirty="0"/>
-              <a:t> +$5,436 con </a:t>
-            </a:r>
-            <a:r>
-              <a:rPr dirty="0" err="1"/>
-              <a:t>cambios</a:t>
-            </a:r>
-            <a:r>
-              <a:rPr dirty="0"/>
-              <a:t> </a:t>
-            </a:r>
-            <a:r>
-              <a:rPr dirty="0" err="1"/>
-              <a:t>cosméticos</a:t>
-            </a:r>
-            <a:r>
-              <a:rPr dirty="0"/>
-              <a:t> de </a:t>
-            </a:r>
-            <a:r>
-              <a:rPr dirty="0" err="1"/>
-              <a:t>encimera</a:t>
-            </a:r>
-            <a:r>
-              <a:rPr dirty="0"/>
-              <a:t>/</a:t>
-            </a:r>
-            <a:r>
-              <a:rPr dirty="0" err="1"/>
-              <a:t>muebles</a:t>
-            </a:r>
-            <a:r>
-              <a:rPr dirty="0"/>
-              <a:t> (~$4k de </a:t>
-            </a:r>
-            <a:r>
-              <a:rPr dirty="0" err="1"/>
-              <a:t>costo</a:t>
-            </a:r>
-            <a:r>
-              <a:rPr dirty="0"/>
-              <a:t>).</a:t>
-            </a:r>
+            <a:endParaRPr dirty="0"/>
           </a:p>
           <a:p>
             <a:pPr>
@@ -8761,119 +8536,12 @@
             </a:pPr>
             <a:r>
               <a:rPr dirty="0"/>
-              <a:t>3. </a:t>
-            </a:r>
-            <a:r>
-              <a:rPr dirty="0" err="1"/>
-              <a:t>Inversión</a:t>
-            </a:r>
-            <a:r>
-              <a:rPr dirty="0"/>
-              <a:t> </a:t>
-            </a:r>
-            <a:r>
-              <a:rPr dirty="0" err="1"/>
-              <a:t>Desaconsejada</a:t>
-            </a:r>
-            <a:r>
-              <a:rPr dirty="0"/>
-              <a:t>:</a:t>
+              <a:t>3. Precaución de Inversión:• Chimenea desde cero: Aunque el impacto bruto es de +$11,305, el costo de construir tiros y ductos nuevos suele absorber o superar la ganancia, convirtiéndola en una inversión de alto riesgo para el vendedor.</a:t>
             </a:r>
             <a:br>
               <a:rPr dirty="0"/>
             </a:br>
-            <a:r>
-              <a:rPr dirty="0"/>
-              <a:t>• Chimenea </a:t>
-            </a:r>
-            <a:r>
-              <a:rPr dirty="0" err="1"/>
-              <a:t>desde</a:t>
-            </a:r>
-            <a:r>
-              <a:rPr dirty="0"/>
-              <a:t> cero: </a:t>
-            </a:r>
-            <a:r>
-              <a:rPr dirty="0" err="1"/>
-              <a:t>Aunque</a:t>
-            </a:r>
-            <a:r>
-              <a:rPr dirty="0"/>
-              <a:t> </a:t>
-            </a:r>
-            <a:r>
-              <a:rPr dirty="0" err="1"/>
-              <a:t>sube</a:t>
-            </a:r>
-            <a:r>
-              <a:rPr dirty="0"/>
-              <a:t> el </a:t>
-            </a:r>
-            <a:r>
-              <a:rPr dirty="0" err="1"/>
-              <a:t>precio</a:t>
-            </a:r>
-            <a:r>
-              <a:rPr dirty="0"/>
-              <a:t> </a:t>
-            </a:r>
-            <a:r>
-              <a:rPr dirty="0" err="1"/>
-              <a:t>en</a:t>
-            </a:r>
-            <a:r>
-              <a:rPr dirty="0"/>
-              <a:t> $11,3</a:t>
-            </a:r>
-            <a:r>
-              <a:rPr lang="es-ES" dirty="0"/>
-              <a:t>05</a:t>
-            </a:r>
-            <a:r>
-              <a:rPr dirty="0"/>
-              <a:t>, la </a:t>
-            </a:r>
-            <a:r>
-              <a:rPr dirty="0" err="1"/>
-              <a:t>obra</a:t>
-            </a:r>
-            <a:r>
-              <a:rPr dirty="0"/>
-              <a:t> civil </a:t>
-            </a:r>
-            <a:r>
-              <a:rPr dirty="0" err="1"/>
-              <a:t>supera</a:t>
-            </a:r>
-            <a:r>
-              <a:rPr dirty="0"/>
-              <a:t> </a:t>
-            </a:r>
-            <a:r>
-              <a:rPr dirty="0" err="1"/>
-              <a:t>los</a:t>
-            </a:r>
-            <a:r>
-              <a:rPr dirty="0"/>
-              <a:t> $11,500 (</a:t>
-            </a:r>
-            <a:r>
-              <a:rPr dirty="0" err="1"/>
-              <a:t>riesgo</a:t>
-            </a:r>
-            <a:r>
-              <a:rPr dirty="0"/>
-              <a:t> de </a:t>
-            </a:r>
-            <a:r>
-              <a:rPr dirty="0" err="1"/>
-              <a:t>pérdida</a:t>
-            </a:r>
-            <a:r>
-              <a:rPr dirty="0"/>
-              <a:t>).</a:t>
-            </a:r>
+            <a:endParaRPr dirty="0"/>
           </a:p>
           <a:p>
             <a:pPr>
@@ -8888,51 +8556,35 @@
             </a:pPr>
             <a:r>
               <a:rPr dirty="0"/>
-              <a:t>* Fuentes de </a:t>
-            </a:r>
-            <a:r>
-              <a:rPr dirty="0" err="1"/>
-              <a:t>costos</a:t>
-            </a:r>
-            <a:r>
-              <a:rPr dirty="0"/>
-              <a:t>: Cost vs. Value Report (www.costvsvalue.com) &amp; NAHB (www.nahb.org); no </a:t>
-            </a:r>
-            <a:r>
-              <a:rPr dirty="0" err="1"/>
-              <a:t>provienen</a:t>
-            </a:r>
-            <a:r>
-              <a:rPr dirty="0"/>
-              <a:t> del dataset original y </a:t>
-            </a:r>
-            <a:r>
-              <a:rPr dirty="0" err="1"/>
-              <a:t>deben</a:t>
-            </a:r>
-            <a:r>
-              <a:rPr dirty="0"/>
-              <a:t> </a:t>
-            </a:r>
-            <a:r>
-              <a:rPr dirty="0" err="1"/>
-              <a:t>cotizarse</a:t>
-            </a:r>
-            <a:r>
-              <a:rPr dirty="0"/>
-              <a:t> con </a:t>
-            </a:r>
-            <a:r>
-              <a:rPr dirty="0" err="1"/>
-              <a:t>contratistas</a:t>
-            </a:r>
-            <a:r>
-              <a:rPr dirty="0"/>
-              <a:t> locales.</a:t>
-            </a:r>
-          </a:p>
-        </p:txBody>
-      </p:sp>
+              <a:t>* El dataset no incluye costos de remodelación — esto ordena impacto en el precio, no rentabilidad en dólares. Confirmar la rentabilidad real requiere cotizaciones de contratistas locales de Cedar Falls.</a:t>
+            </a:r>
+          </a:p>
+        </p:txBody>
+      </p:sp>
+      <p:pic>
+        <p:nvPicPr>
+          <p:cNvPr id="9" name="Picture 8" descr="_slide8_chart_fixed_es.png"/>
+          <p:cNvPicPr>
+            <a:picLocks noChangeAspect="1"/>
+          </p:cNvPicPr>
+          <p:nvPr/>
+        </p:nvPicPr>
+        <p:blipFill>
+          <a:blip r:embed="rId3"/>
+          <a:stretch>
+            <a:fillRect/>
+          </a:stretch>
+        </p:blipFill>
+        <p:spPr>
+          <a:xfrm>
+            <a:off x="731520" y="1371600"/>
+            <a:ext cx="6035040" cy="2983615"/>
+          </a:xfrm>
+          <a:prstGeom prst="rect">
+            <a:avLst/>
+          </a:prstGeom>
+        </p:spPr>
+      </p:pic>
     </p:spTree>
   </p:cSld>
   <p:clrMapOvr>

--- a/Presentacion_Ejecutiva_Clearview_Properties_Cuesta.pptx
+++ b/Presentacion_Ejecutiva_Clearview_Properties_Cuesta.pptx
@@ -8496,10 +8496,7 @@
               <a:t>1. Quick Wins (Alto Impacto):• Baño Adicional: Entrega un retorno promedio de +$9,688 por baño completo adicional (y +$4,844 por medio baño). Es la intervención puntual más sólida y universal del mercado.• Pavimentación: Genera una ganancia directa de +$5,273 en el precio. Es la llave estratégica y de bajo costo para sacar una propiedad del segmento más barato de la ciudad.• Garaje Terminado: Aporta +$3,025 a la tasación con un costo de obra mínimo (enlucido y pintura de paredes/cielos).</a:t>
             </a:r>
             <a:br>
-              <a:rPr dirty="0"/>
-            </a:br>
-            <a:br>
-              <a:rPr dirty="0"/>
+              <a:rPr/>
             </a:br>
             <a:endParaRPr dirty="0"/>
           </a:p>
